--- a/decks/hist-mughal-india/hist-mughal-india_ch6_collapse-legacy.pptx
+++ b/decks/hist-mughal-india/hist-mughal-india_ch6_collapse-legacy.pptx
@@ -125,29 +125,29 @@
   <p:extLst>
     <p:ext uri="{521415D9-36F7-43E2-AB2F-B90AF26B5E84}">
       <p14:sectionLst xmlns:p14="http://schemas.microsoft.com/office/powerpoint/2010/main">
-        <p14:section name="Opening" id="{6c106461-2fc0-5048-eadb-7fe3fe9e406a}">
+        <p14:section name="Opening" id="{9b548869-1bf9-29ac-5c86-7c30789434e7}">
           <p14:sldIdLst>
             <p14:sldId id="256"/>
           </p14:sldIdLst>
         </p14:section>
-        <p14:section name="Gate" id="{902918b6-a669-4226-a805-ca64cfb9fd05}">
+        <p14:section name="Gate" id="{fb3f336c-f0ae-2b19-8386-2698e868d3c3}">
           <p14:sldIdLst>
             <p14:sldId id="257"/>
             <p14:sldId id="258"/>
           </p14:sldIdLst>
         </p14:section>
-        <p14:section name="Pre-teach" id="{b12c4cd0-d488-16fc-df1d-41e0a1209728}">
+        <p14:section name="Pre-teach" id="{220721f5-dc28-79ff-37d6-f9af15835a5e}">
           <p14:sldIdLst>
             <p14:sldId id="259"/>
           </p14:sldIdLst>
         </p14:section>
-        <p14:section name="Read-along" id="{24197abb-18fb-6d57-39f2-495d19cadcd6}">
+        <p14:section name="Read-along" id="{1f32ca0f-da5b-0f67-fd1e-7cca06ba9842}">
           <p14:sldIdLst>
             <p14:sldId id="260"/>
             <p14:sldId id="261"/>
           </p14:sldIdLst>
         </p14:section>
-        <p14:section name="Teach" id="{e6df7043-33a8-c0af-9acc-8fe04d4f0209}">
+        <p14:section name="Teach" id="{92890f98-3bd8-8f82-1a16-3004c17c324f}">
           <p14:sldIdLst>
             <p14:sldId id="262"/>
             <p14:sldId id="263"/>
@@ -156,7 +156,7 @@
             <p14:sldId id="266"/>
           </p14:sldIdLst>
         </p14:section>
-        <p14:section name="Routes" id="{27fe0e12-702d-1d96-2d3a-8dfa7fe459d1}">
+        <p14:section name="Routes" id="{beb887c7-82f4-7c12-c072-38c18d8fcfd3}">
           <p14:sldIdLst>
             <p14:sldId id="267"/>
             <p14:sldId id="268"/>
@@ -164,12 +164,12 @@
             <p14:sldId id="270"/>
           </p14:sldIdLst>
         </p14:section>
-        <p14:section name="Close" id="{346dc885-bf60-3479-f03d-dd0d697c73e0}">
+        <p14:section name="Close" id="{4b39681d-a9b9-d71d-68a8-37a7079a9e27}">
           <p14:sldIdLst>
             <p14:sldId id="271"/>
           </p14:sldIdLst>
         </p14:section>
-        <p14:section name="Answers" id="{21ef12a2-80d0-bfa3-f629-e2a2e084c081}">
+        <p14:section name="Answers" id="{50c68683-751a-26ec-94ed-b1d2ef74c8c8}">
           <p14:sldIdLst>
             <p14:sldId id="272"/>
             <p14:sldId id="273"/>
@@ -1691,7 +1691,7 @@
               <a:rPr lang="en-US" dirty="0"/>
               <a:t>Answers — pupils mark their own in a different colour, then hands up for 3/3, 2/3, 1/3.
 1. 1707. Aurangzeb died in 1707 after a fifty-year reign. The unit's period of study runs from 1526 to 1707.
-2. B   The British East India Company. Your lesson says that by 1757 the British East India Company had taken financial and political control over India, fifty years after Aurangzeb's death.
+2. B   The British East India Company. Your lesson says that by 1757 the British East India Company controlled both the money and the government of India, fifty years after Aurangzeb's death.
 3. interpretation. Section B of your assessment gives you an interpretation: one historian's considered view, which you test against your own knowledge.
 Say the route each score points to: 3/3 Stretch, 2/3 Core, 0–1 Support. Pupils may choose to move up.</a:t>
             </a:r>
@@ -12482,7 +12482,7 @@
                 <a:ea typeface="Calibri" pitchFamily="34" charset="-122"/>
                 <a:cs typeface="Calibri" pitchFamily="34" charset="-120"/>
               </a:rPr>
-              <a:t>Your lesson says that by 1757 the British East India Company had taken financial and political control over India, fifty years after Aurangzeb's death.</a:t>
+              <a:t>Your lesson says that by 1757 the British East India Company controlled both the money and the government of India, fifty years after Aurangzeb's death.</a:t>
             </a:r>
             <a:endParaRPr lang="en-US" sz="1800" dirty="0"/>
           </a:p>
